--- a/deliverable/DELIVERY_01a0aa00_v2.8.1.pptx
+++ b/deliverable/DELIVERY_01a0aa00_v2.8.1.pptx
@@ -3236,6 +3236,14 @@
               <a:defRPr sz="1300"/>
             </a:pPr>
             <a:r>
+              <a:t>deliverable/DECK_01a0aa00_v2.8.1.pptx (pptx, 46582 B, sha256 0c2ff1af1f79...)</a:t>
+            </a:r>
+          </a:p>
+          <a:p>
+            <a:pPr>
+              <a:defRPr sz="1300"/>
+            </a:pPr>
+            <a:r>
               <a:t>生成器 code/make_bridge_report.py（先过 3a-3g 镜像自检）</a:t>
             </a:r>
           </a:p>
@@ -3299,7 +3307,7 @@
               <a:defRPr sz="1300"/>
             </a:pPr>
             <a:r>
-              <a:t>round 18 on LAPTOP-R77M5D6M - passed</a:t>
+              <a:t>round 20 on LAPTOP-R77M5D6M - passed</a:t>
             </a:r>
           </a:p>
           <a:p>
@@ -3307,7 +3315,7 @@
               <a:defRPr sz="1300"/>
             </a:pPr>
             <a:r>
-              <a:t>round 20 on LAPTOP-R77M5D6M - passed</a:t>
+              <a:t>round 21 on LAPTOP-R77M5D6M - passed</a:t>
             </a:r>
           </a:p>
           <a:p>
@@ -3315,7 +3323,7 @@
               <a:defRPr sz="1300"/>
             </a:pPr>
             <a:r>
-              <a:t>round 21 on LAPTOP-R77M5D6M - passed</a:t>
+              <a:t>round 22 on LAPTOP-R77M5D6M - passed</a:t>
             </a:r>
           </a:p>
           <a:p>
